--- a/ECF_5.9.pptx
+++ b/ECF_5.9.pptx
@@ -205,7 +205,7 @@
           <a:p>
             <a:fld id="{28F42C19-B338-4F81-94DB-166F61EDD589}" type="datetimeFigureOut">
               <a:rPr lang="en-GB" smtClean="0"/>
-              <a:t>10/05/2026</a:t>
+              <a:t>11/05/2026</a:t>
             </a:fld>
             <a:endParaRPr lang="en-GB"/>
           </a:p>
@@ -1273,7 +1273,7 @@
           <a:p>
             <a:fld id="{D30DA566-1EE8-457F-B6F6-E11D46C3561A}" type="datetimeFigureOut">
               <a:rPr lang="en-GB" smtClean="0"/>
-              <a:t>10/05/2026</a:t>
+              <a:t>11/05/2026</a:t>
             </a:fld>
             <a:endParaRPr lang="en-GB"/>
           </a:p>
@@ -1473,7 +1473,7 @@
           <a:p>
             <a:fld id="{D30DA566-1EE8-457F-B6F6-E11D46C3561A}" type="datetimeFigureOut">
               <a:rPr lang="en-GB" smtClean="0"/>
-              <a:t>10/05/2026</a:t>
+              <a:t>11/05/2026</a:t>
             </a:fld>
             <a:endParaRPr lang="en-GB"/>
           </a:p>
@@ -1683,7 +1683,7 @@
           <a:p>
             <a:fld id="{D30DA566-1EE8-457F-B6F6-E11D46C3561A}" type="datetimeFigureOut">
               <a:rPr lang="en-GB" smtClean="0"/>
-              <a:t>10/05/2026</a:t>
+              <a:t>11/05/2026</a:t>
             </a:fld>
             <a:endParaRPr lang="en-GB"/>
           </a:p>
@@ -1883,7 +1883,7 @@
           <a:p>
             <a:fld id="{D30DA566-1EE8-457F-B6F6-E11D46C3561A}" type="datetimeFigureOut">
               <a:rPr lang="en-GB" smtClean="0"/>
-              <a:t>10/05/2026</a:t>
+              <a:t>11/05/2026</a:t>
             </a:fld>
             <a:endParaRPr lang="en-GB"/>
           </a:p>
@@ -2159,7 +2159,7 @@
           <a:p>
             <a:fld id="{D30DA566-1EE8-457F-B6F6-E11D46C3561A}" type="datetimeFigureOut">
               <a:rPr lang="en-GB" smtClean="0"/>
-              <a:t>10/05/2026</a:t>
+              <a:t>11/05/2026</a:t>
             </a:fld>
             <a:endParaRPr lang="en-GB"/>
           </a:p>
@@ -2427,7 +2427,7 @@
           <a:p>
             <a:fld id="{D30DA566-1EE8-457F-B6F6-E11D46C3561A}" type="datetimeFigureOut">
               <a:rPr lang="en-GB" smtClean="0"/>
-              <a:t>10/05/2026</a:t>
+              <a:t>11/05/2026</a:t>
             </a:fld>
             <a:endParaRPr lang="en-GB"/>
           </a:p>
@@ -2842,7 +2842,7 @@
           <a:p>
             <a:fld id="{D30DA566-1EE8-457F-B6F6-E11D46C3561A}" type="datetimeFigureOut">
               <a:rPr lang="en-GB" smtClean="0"/>
-              <a:t>10/05/2026</a:t>
+              <a:t>11/05/2026</a:t>
             </a:fld>
             <a:endParaRPr lang="en-GB"/>
           </a:p>
@@ -2984,7 +2984,7 @@
           <a:p>
             <a:fld id="{D30DA566-1EE8-457F-B6F6-E11D46C3561A}" type="datetimeFigureOut">
               <a:rPr lang="en-GB" smtClean="0"/>
-              <a:t>10/05/2026</a:t>
+              <a:t>11/05/2026</a:t>
             </a:fld>
             <a:endParaRPr lang="en-GB"/>
           </a:p>
@@ -3097,7 +3097,7 @@
           <a:p>
             <a:fld id="{D30DA566-1EE8-457F-B6F6-E11D46C3561A}" type="datetimeFigureOut">
               <a:rPr lang="en-GB" smtClean="0"/>
-              <a:t>10/05/2026</a:t>
+              <a:t>11/05/2026</a:t>
             </a:fld>
             <a:endParaRPr lang="en-GB"/>
           </a:p>
@@ -3410,7 +3410,7 @@
           <a:p>
             <a:fld id="{D30DA566-1EE8-457F-B6F6-E11D46C3561A}" type="datetimeFigureOut">
               <a:rPr lang="en-GB" smtClean="0"/>
-              <a:t>10/05/2026</a:t>
+              <a:t>11/05/2026</a:t>
             </a:fld>
             <a:endParaRPr lang="en-GB"/>
           </a:p>
@@ -3699,7 +3699,7 @@
           <a:p>
             <a:fld id="{D30DA566-1EE8-457F-B6F6-E11D46C3561A}" type="datetimeFigureOut">
               <a:rPr lang="en-GB" smtClean="0"/>
-              <a:t>10/05/2026</a:t>
+              <a:t>11/05/2026</a:t>
             </a:fld>
             <a:endParaRPr lang="en-GB"/>
           </a:p>
@@ -3942,7 +3942,7 @@
           <a:p>
             <a:fld id="{D30DA566-1EE8-457F-B6F6-E11D46C3561A}" type="datetimeFigureOut">
               <a:rPr lang="en-GB" smtClean="0"/>
-              <a:t>10/05/2026</a:t>
+              <a:t>11/05/2026</a:t>
             </a:fld>
             <a:endParaRPr lang="en-GB"/>
           </a:p>
@@ -5145,7 +5145,7 @@
         </p:nvSpPr>
         <p:spPr>
           <a:xfrm>
-            <a:off x="3235570" y="5261413"/>
+            <a:off x="3221056" y="4999803"/>
             <a:ext cx="4596643" cy="523220"/>
           </a:xfrm>
           <a:prstGeom prst="rect">
@@ -5201,7 +5201,7 @@
         </p:blipFill>
         <p:spPr>
           <a:xfrm>
-            <a:off x="3235570" y="1493482"/>
+            <a:off x="2949017" y="1493482"/>
             <a:ext cx="8956430" cy="3308084"/>
           </a:xfrm>
           <a:prstGeom prst="rect">
@@ -5223,7 +5223,7 @@
         </p:nvSpPr>
         <p:spPr>
           <a:xfrm>
-            <a:off x="757648" y="4599693"/>
+            <a:off x="596257" y="4599693"/>
             <a:ext cx="2191369" cy="923330"/>
           </a:xfrm>
           <a:prstGeom prst="rect">
@@ -5291,7 +5291,7 @@
         </p:nvSpPr>
         <p:spPr>
           <a:xfrm>
-            <a:off x="757648" y="1493482"/>
+            <a:off x="596257" y="1493482"/>
             <a:ext cx="2352760" cy="2862322"/>
           </a:xfrm>
           <a:prstGeom prst="rect">
@@ -5309,7 +5309,10 @@
               <a:rPr lang="en-US" b="1" dirty="0" err="1"/>
               <a:t>Preperiod</a:t>
             </a:r>
-            <a:endParaRPr lang="en-US" b="1" dirty="0"/>
+            <a:r>
+              <a:rPr lang="en-US" b="1" dirty="0"/>
+              <a:t>:</a:t>
+            </a:r>
           </a:p>
           <a:p>
             <a:pPr marL="285750" indent="-285750">
@@ -5371,7 +5374,7 @@
           <a:p>
             <a:r>
               <a:rPr lang="en-US" b="1" dirty="0"/>
-              <a:t>Post-period</a:t>
+              <a:t>Post-period:</a:t>
             </a:r>
           </a:p>
           <a:p>
@@ -5431,120 +5434,6 @@
           <a:chExt cx="0" cy="0"/>
         </a:xfrm>
       </p:grpSpPr>
-      <p:sp>
-        <p:nvSpPr>
-          <p:cNvPr id="2" name="Title 1">
-            <a:extLst>
-              <a:ext uri="{FF2B5EF4-FFF2-40B4-BE49-F238E27FC236}">
-                <a16:creationId xmlns:a16="http://schemas.microsoft.com/office/drawing/2014/main" id="{B82AAE7A-7BE2-F2B8-BA89-CA560B4EB831}"/>
-              </a:ext>
-            </a:extLst>
-          </p:cNvPr>
-          <p:cNvSpPr>
-            <a:spLocks noGrp="1"/>
-          </p:cNvSpPr>
-          <p:nvPr>
-            <p:ph type="title"/>
-          </p:nvPr>
-        </p:nvSpPr>
-        <p:spPr/>
-        <p:txBody>
-          <a:bodyPr/>
-          <a:lstStyle/>
-          <a:p>
-            <a:r>
-              <a:rPr lang="en-CN" dirty="0"/>
-              <a:t>Data</a:t>
-            </a:r>
-          </a:p>
-        </p:txBody>
-      </p:sp>
-      <p:sp>
-        <p:nvSpPr>
-          <p:cNvPr id="3" name="Content Placeholder 2">
-            <a:extLst>
-              <a:ext uri="{FF2B5EF4-FFF2-40B4-BE49-F238E27FC236}">
-                <a16:creationId xmlns:a16="http://schemas.microsoft.com/office/drawing/2014/main" id="{3273F098-7CCF-EEC7-3D46-D98254191DC7}"/>
-              </a:ext>
-            </a:extLst>
-          </p:cNvPr>
-          <p:cNvSpPr>
-            <a:spLocks noGrp="1"/>
-          </p:cNvSpPr>
-          <p:nvPr>
-            <p:ph idx="1"/>
-          </p:nvPr>
-        </p:nvSpPr>
-        <p:spPr>
-          <a:xfrm>
-            <a:off x="838200" y="1492160"/>
-            <a:ext cx="2977661" cy="4351338"/>
-          </a:xfrm>
-        </p:spPr>
-        <p:txBody>
-          <a:bodyPr>
-            <a:normAutofit/>
-          </a:bodyPr>
-          <a:lstStyle/>
-          <a:p>
-            <a:pPr marL="0" indent="0">
-              <a:buNone/>
-            </a:pPr>
-            <a:r>
-              <a:rPr lang="en-US" sz="1800" b="1" dirty="0"/>
-              <a:t>Data Sample</a:t>
-            </a:r>
-          </a:p>
-          <a:p>
-            <a:r>
-              <a:rPr lang="en-US" sz="1800" dirty="0"/>
-              <a:t>Data Length:  2012 - 2022</a:t>
-            </a:r>
-          </a:p>
-          <a:p>
-            <a:r>
-              <a:rPr lang="en-US" sz="1800" dirty="0"/>
-              <a:t>Databases: </a:t>
-            </a:r>
-            <a:r>
-              <a:rPr lang="en-US" sz="1800" dirty="0" err="1"/>
-              <a:t>ExecuComp</a:t>
-            </a:r>
-            <a:r>
-              <a:rPr lang="en-US" sz="1800" dirty="0"/>
-              <a:t>, SDC</a:t>
-            </a:r>
-          </a:p>
-          <a:p>
-            <a:pPr marL="0" indent="0">
-              <a:buNone/>
-            </a:pPr>
-            <a:endParaRPr lang="en-US" sz="1800" b="1" dirty="0"/>
-          </a:p>
-          <a:p>
-            <a:pPr marL="0" indent="0">
-              <a:buNone/>
-            </a:pPr>
-            <a:r>
-              <a:rPr lang="en-US" sz="1800" b="1" dirty="0"/>
-              <a:t>As a reader:</a:t>
-            </a:r>
-          </a:p>
-          <a:p>
-            <a:r>
-              <a:rPr lang="en-US" sz="1800" dirty="0"/>
-              <a:t>Why did they stop at 2022? </a:t>
-            </a:r>
-          </a:p>
-          <a:p>
-            <a:r>
-              <a:rPr lang="en-US" sz="1800" dirty="0"/>
-              <a:t>Did the results from the later years not support their story? </a:t>
-            </a:r>
-            <a:endParaRPr lang="en-CN" sz="1800" dirty="0"/>
-          </a:p>
-        </p:txBody>
-      </p:sp>
       <p:pic>
         <p:nvPicPr>
           <p:cNvPr id="5" name="Picture 4" descr="A diagram of a timeline&#10;&#10;Description automatically generated with medium confidence">
@@ -5572,7 +5461,7 @@
         </p:blipFill>
         <p:spPr>
           <a:xfrm>
-            <a:off x="3878256" y="1253331"/>
+            <a:off x="3373885" y="1253331"/>
             <a:ext cx="8313744" cy="4351338"/>
           </a:xfrm>
           <a:prstGeom prst="rect">
@@ -5580,6 +5469,126 @@
           </a:prstGeom>
         </p:spPr>
       </p:pic>
+      <p:sp>
+        <p:nvSpPr>
+          <p:cNvPr id="2" name="Title 1">
+            <a:extLst>
+              <a:ext uri="{FF2B5EF4-FFF2-40B4-BE49-F238E27FC236}">
+                <a16:creationId xmlns:a16="http://schemas.microsoft.com/office/drawing/2014/main" id="{B82AAE7A-7BE2-F2B8-BA89-CA560B4EB831}"/>
+              </a:ext>
+            </a:extLst>
+          </p:cNvPr>
+          <p:cNvSpPr>
+            <a:spLocks noGrp="1"/>
+          </p:cNvSpPr>
+          <p:nvPr>
+            <p:ph type="title"/>
+          </p:nvPr>
+        </p:nvSpPr>
+        <p:spPr/>
+        <p:txBody>
+          <a:bodyPr/>
+          <a:lstStyle/>
+          <a:p>
+            <a:r>
+              <a:rPr lang="en-CN" dirty="0"/>
+              <a:t>Data</a:t>
+            </a:r>
+          </a:p>
+        </p:txBody>
+      </p:sp>
+      <p:sp>
+        <p:nvSpPr>
+          <p:cNvPr id="3" name="Content Placeholder 2">
+            <a:extLst>
+              <a:ext uri="{FF2B5EF4-FFF2-40B4-BE49-F238E27FC236}">
+                <a16:creationId xmlns:a16="http://schemas.microsoft.com/office/drawing/2014/main" id="{3273F098-7CCF-EEC7-3D46-D98254191DC7}"/>
+              </a:ext>
+            </a:extLst>
+          </p:cNvPr>
+          <p:cNvSpPr>
+            <a:spLocks noGrp="1"/>
+          </p:cNvSpPr>
+          <p:nvPr>
+            <p:ph idx="1"/>
+          </p:nvPr>
+        </p:nvSpPr>
+        <p:spPr>
+          <a:xfrm>
+            <a:off x="504371" y="1492160"/>
+            <a:ext cx="3167743" cy="4351338"/>
+          </a:xfrm>
+        </p:spPr>
+        <p:txBody>
+          <a:bodyPr>
+            <a:normAutofit/>
+          </a:bodyPr>
+          <a:lstStyle/>
+          <a:p>
+            <a:pPr marL="0" indent="0">
+              <a:buNone/>
+            </a:pPr>
+            <a:r>
+              <a:rPr lang="en-US" sz="1800" b="1" dirty="0"/>
+              <a:t>Data Sample</a:t>
+            </a:r>
+          </a:p>
+          <a:p>
+            <a:r>
+              <a:rPr lang="en-US" sz="1800" dirty="0"/>
+              <a:t>Data Length: 2012-2022</a:t>
+            </a:r>
+          </a:p>
+          <a:p>
+            <a:r>
+              <a:rPr lang="en-US" sz="1800" dirty="0"/>
+              <a:t>Databases: </a:t>
+            </a:r>
+            <a:r>
+              <a:rPr lang="en-US" sz="1800" dirty="0" err="1"/>
+              <a:t>ExecuComp</a:t>
+            </a:r>
+            <a:r>
+              <a:rPr lang="en-US" sz="1800" dirty="0"/>
+              <a:t>, SDC</a:t>
+            </a:r>
+          </a:p>
+          <a:p>
+            <a:pPr marL="0" indent="0">
+              <a:buNone/>
+            </a:pPr>
+            <a:endParaRPr lang="en-US" sz="1800" b="1" dirty="0"/>
+          </a:p>
+          <a:p>
+            <a:pPr marL="0" indent="0">
+              <a:buNone/>
+            </a:pPr>
+            <a:endParaRPr lang="en-US" sz="1800" b="1" dirty="0"/>
+          </a:p>
+          <a:p>
+            <a:pPr marL="0" indent="0">
+              <a:buNone/>
+            </a:pPr>
+            <a:r>
+              <a:rPr lang="en-US" sz="1800" b="1" dirty="0"/>
+              <a:t>As a reader:</a:t>
+            </a:r>
+          </a:p>
+          <a:p>
+            <a:r>
+              <a:rPr lang="en-US" sz="1800" dirty="0"/>
+              <a:t>Why did they stop at 2022? </a:t>
+            </a:r>
+          </a:p>
+          <a:p>
+            <a:r>
+              <a:rPr lang="en-US" sz="1800" dirty="0"/>
+              <a:t>Did the results from the later years not support their story? </a:t>
+            </a:r>
+            <a:endParaRPr lang="en-CN" sz="1800" dirty="0"/>
+          </a:p>
+        </p:txBody>
+      </p:sp>
       <p:sp>
         <p:nvSpPr>
           <p:cNvPr id="7" name="TextBox 6">
@@ -5678,8 +5687,8 @@
         </p:blipFill>
         <p:spPr>
           <a:xfrm>
-            <a:off x="5669391" y="1248508"/>
-            <a:ext cx="6051556" cy="4747846"/>
+            <a:off x="5280419" y="1172344"/>
+            <a:ext cx="6495906" cy="5096468"/>
           </a:xfrm>
           <a:prstGeom prst="rect">
             <a:avLst/>
@@ -5744,22 +5753,22 @@
           <a:lstStyle/>
           <a:p>
             <a:r>
-              <a:rPr lang="en-US" sz="1800" dirty="0"/>
-              <a:t>the paper is well-referenced</a:t>
-            </a:r>
-          </a:p>
-          <a:p>
-            <a:r>
-              <a:rPr lang="en-US" sz="1800" dirty="0"/>
-              <a:t>figures and tables that follow academic standards</a:t>
-            </a:r>
-          </a:p>
-          <a:p>
-            <a:r>
-              <a:rPr lang="en-US" sz="1800" dirty="0"/>
-              <a:t>the explanation of data sources is very thorough</a:t>
-            </a:r>
-            <a:endParaRPr lang="en-CN" sz="1800" dirty="0"/>
+              <a:rPr lang="en-US" sz="2000" dirty="0"/>
+              <a:t>The paper is well-referenced</a:t>
+            </a:r>
+          </a:p>
+          <a:p>
+            <a:r>
+              <a:rPr lang="en-US" sz="2000" dirty="0"/>
+              <a:t>Figures and tables that follow academic standards</a:t>
+            </a:r>
+          </a:p>
+          <a:p>
+            <a:r>
+              <a:rPr lang="en-US" sz="2000" dirty="0"/>
+              <a:t>The explanation of data sources is very thorough</a:t>
+            </a:r>
+            <a:endParaRPr lang="en-CN" sz="2000" dirty="0"/>
           </a:p>
         </p:txBody>
       </p:sp>
